--- a/assets/pptx/catalog-467.pptx
+++ b/assets/pptx/catalog-467.pptx
@@ -3302,7 +3302,7 @@
                 <a:ea typeface="Ebrima"/>
                 <a:cs typeface="Ebrima"/>
               </a:rPr>
-              <a:t>የኖርኩበት ዘመን በክብር ተካሰ (2x)</a:t>
+              <a:t>የኖርኩበት ዘመን በክብር ተካሰ 2x</a:t>
             </a:r>
           </a:p>
         </p:txBody>
@@ -3423,7 +3423,7 @@
                 <a:ea typeface="Ebrima"/>
                 <a:cs typeface="Ebrima"/>
               </a:rPr>
-              <a:t>ኧረ እኔስ ማን ልበለው (4x)</a:t>
+              <a:t>ኧረ እኔስ ማን ልበለው 4x</a:t>
             </a:r>
           </a:p>
         </p:txBody>
@@ -3508,7 +3508,7 @@
                 <a:ea typeface="Ebrima"/>
                 <a:cs typeface="Ebrima"/>
               </a:rPr>
-              <a:t>ደጅ አድሬ አላውቅም ከእቅፉ ወጥቼ (2x)</a:t>
+              <a:t>ደጅ አድሬ አላውቅም ከእቅፉ ወጥቼ 2x</a:t>
             </a:r>
           </a:p>
         </p:txBody>
@@ -3575,7 +3575,7 @@
                 <a:ea typeface="Ebrima"/>
                 <a:cs typeface="Ebrima"/>
               </a:rPr>
-              <a:t>እዩ አባት (2x) ነፍሱን እስከመስጠት (2x)</a:t>
+              <a:t>እዩ አባት 2x ነፍሱን እስከመስጠት 2x</a:t>
             </a:r>
           </a:p>
         </p:txBody>
@@ -3660,7 +3660,7 @@
                 <a:ea typeface="Ebrima"/>
                 <a:cs typeface="Ebrima"/>
               </a:rPr>
-              <a:t>እረ እንዴት ጭንቅ ነው የመከራው ናዳ (2x)</a:t>
+              <a:t>እረ እንዴት ጭንቅ ነው የመከራው ናዳ 2x</a:t>
             </a:r>
           </a:p>
           <a:p>
@@ -3696,7 +3696,7 @@
                 <a:ea typeface="Ebrima"/>
                 <a:cs typeface="Ebrima"/>
               </a:rPr>
-              <a:t>የአለእድሜዬ ክብር አሳየኝ አቁሞ (2x)</a:t>
+              <a:t>የአለእድሜዬ ክብር አሳየኝ አቁሞ 2x</a:t>
             </a:r>
           </a:p>
         </p:txBody>
@@ -3817,7 +3817,7 @@
                 <a:ea typeface="Ebrima"/>
                 <a:cs typeface="Ebrima"/>
               </a:rPr>
-              <a:t>ኧረ እኔስ ማን ልበለው (4x)</a:t>
+              <a:t>ኧረ እኔስ ማን ልበለው 4x</a:t>
             </a:r>
           </a:p>
         </p:txBody>
@@ -4005,7 +4005,7 @@
                 <a:ea typeface="Ebrima"/>
                 <a:cs typeface="Ebrima"/>
               </a:rPr>
-              <a:t>እዩ አባት (2x) ነፍሱን እስከመስጠት (5x)</a:t>
+              <a:t>እዩ አባት 2x ነፍሱን እስከመስጠት 5x</a:t>
             </a:r>
           </a:p>
         </p:txBody>
